--- a/lectures/week11/lecture2/slides/week11_lecture2.pptx
+++ b/lectures/week11/lecture2/slides/week11_lecture2.pptx
@@ -223,7 +223,7 @@
           <a:p>
             <a:fld id="{125D7D83-D401-9A49-861D-A02E2788C764}" type="datetimeFigureOut">
               <a:rPr lang="en-US" smtClean="0"/>
-              <a:t>3/23/2026</a:t>
+              <a:t>3/30/2026</a:t>
             </a:fld>
             <a:endParaRPr lang="en-US"/>
           </a:p>
@@ -2782,31 +2782,7 @@
           <a:p>
             <a:r>
               <a:rPr lang="en-US" dirty="0"/>
-              <a:t>Files</a:t>
-            </a:r>
-            <a:r>
-              <a:rPr lang="en-US" dirty="0">
-                <a:solidFill>
-                  <a:srgbClr val="00FF00"/>
-                </a:solidFill>
-              </a:rPr>
-              <a:t>,</a:t>
-            </a:r>
-            <a:r>
-              <a:rPr lang="en-US" dirty="0"/>
-              <a:t> CSV</a:t>
-            </a:r>
-            <a:r>
-              <a:rPr lang="en-US" dirty="0">
-                <a:solidFill>
-                  <a:srgbClr val="00FF00"/>
-                </a:solidFill>
-              </a:rPr>
-              <a:t>s</a:t>
-            </a:r>
-            <a:r>
-              <a:rPr lang="en-US" dirty="0"/>
-              <a:t> and Modules</a:t>
+              <a:t>Pandas</a:t>
             </a:r>
             <a:r>
               <a:rPr lang="en-US" dirty="0">
@@ -9331,8 +9307,8 @@
         </p:nvSpPr>
         <p:spPr>
           <a:xfrm>
-            <a:off x="7636042" y="1184405"/>
-            <a:ext cx="3906839" cy="646331"/>
+            <a:off x="7220952" y="1029719"/>
+            <a:ext cx="4185761" cy="707886"/>
           </a:xfrm>
           <a:prstGeom prst="rect">
             <a:avLst/>
@@ -9349,7 +9325,7 @@
               <a:buNone/>
             </a:pPr>
             <a:r>
-              <a:rPr lang="en-GB" dirty="0">
+              <a:rPr lang="en-GB" sz="2000" b="1" dirty="0">
                 <a:solidFill>
                   <a:srgbClr val="00FF00"/>
                 </a:solidFill>
@@ -9361,7 +9337,7 @@
           </a:p>
           <a:p>
             <a:r>
-              <a:rPr lang="en-GB" dirty="0">
+              <a:rPr lang="en-GB" sz="2000" b="1" dirty="0">
                 <a:solidFill>
                   <a:srgbClr val="00FF00"/>
                 </a:solidFill>
@@ -9371,7 +9347,7 @@
               <a:t>print(</a:t>
             </a:r>
             <a:r>
-              <a:rPr lang="en-GB" dirty="0" err="1">
+              <a:rPr lang="en-GB" sz="2000" b="1" dirty="0" err="1">
                 <a:solidFill>
                   <a:srgbClr val="00FF00"/>
                 </a:solidFill>
@@ -9381,7 +9357,7 @@
               <a:t>math.sqrt</a:t>
             </a:r>
             <a:r>
-              <a:rPr lang="en-GB" dirty="0">
+              <a:rPr lang="en-GB" sz="2000" b="1" dirty="0">
                 <a:solidFill>
                   <a:srgbClr val="00FF00"/>
                 </a:solidFill>
@@ -9493,8 +9469,24 @@
               <a:t>Modularity</a:t>
             </a:r>
             <a:r>
+              <a:rPr lang="en-CA" dirty="0">
+                <a:solidFill>
+                  <a:srgbClr val="00FF00"/>
+                </a:solidFill>
+              </a:rPr>
+              <a:t>:</a:t>
+            </a:r>
+            <a:r>
+              <a:rPr lang="en-CA" dirty="0">
+                <a:solidFill>
+                  <a:schemeClr val="accent6"/>
+                </a:solidFill>
+              </a:rPr>
+              <a:t> </a:t>
+            </a:r>
+            <a:r>
               <a:rPr lang="en-CA" dirty="0"/>
-              <a:t>:</a:t>
+              <a:t>Split large applications into smaller</a:t>
             </a:r>
             <a:r>
               <a:rPr lang="en-CA" dirty="0">
@@ -9502,11 +9494,19 @@
                   <a:schemeClr val="accent6"/>
                 </a:solidFill>
               </a:rPr>
-              <a:t> </a:t>
+              <a:t>,</a:t>
             </a:r>
             <a:r>
               <a:rPr lang="en-CA" dirty="0"/>
-              <a:t>Split large applications into smaller, manageable pieces</a:t>
+              <a:t> manageable pieces</a:t>
+            </a:r>
+            <a:r>
+              <a:rPr lang="en-CA" dirty="0">
+                <a:solidFill>
+                  <a:schemeClr val="accent6"/>
+                </a:solidFill>
+              </a:rPr>
+              <a:t>.</a:t>
             </a:r>
           </a:p>
           <a:p>
@@ -9516,7 +9516,7 @@
               <a:t>Think back our fancy dictionary printing function called </a:t>
             </a:r>
             <a:r>
-              <a:rPr lang="en-CA" dirty="0" err="1">
+              <a:rPr lang="en-CA" b="1" dirty="0" err="1">
                 <a:solidFill>
                   <a:srgbClr val="00FF00"/>
                 </a:solidFill>
@@ -9526,7 +9526,7 @@
               <a:t>dict_print</a:t>
             </a:r>
             <a:r>
-              <a:rPr lang="en-CA" dirty="0">
+              <a:rPr lang="en-CA" b="1" dirty="0">
                 <a:solidFill>
                   <a:srgbClr val="00FF00"/>
                 </a:solidFill>
@@ -9540,18 +9540,30 @@
               <a:t>that we imported from our custom </a:t>
             </a:r>
             <a:r>
+              <a:rPr lang="en-CA" b="1" dirty="0">
+                <a:solidFill>
+                  <a:srgbClr val="00FF00"/>
+                </a:solidFill>
+                <a:latin typeface="Courier New" panose="02070309020205020404" pitchFamily="49" charset="0"/>
+                <a:cs typeface="Courier New" panose="02070309020205020404" pitchFamily="49" charset="0"/>
+              </a:rPr>
+              <a:t>utils</a:t>
+            </a:r>
+            <a:r>
+              <a:rPr lang="en-CA" dirty="0"/>
+              <a:t> module</a:t>
+            </a:r>
+            <a:r>
               <a:rPr lang="en-CA" dirty="0">
                 <a:solidFill>
-                  <a:srgbClr val="00FF00"/>
-                </a:solidFill>
-                <a:latin typeface="Courier New" panose="02070309020205020404" pitchFamily="49" charset="0"/>
-                <a:cs typeface="Courier New" panose="02070309020205020404" pitchFamily="49" charset="0"/>
-              </a:rPr>
-              <a:t>utils</a:t>
+                  <a:schemeClr val="accent6"/>
+                </a:solidFill>
+              </a:rPr>
+              <a:t>.</a:t>
             </a:r>
             <a:r>
               <a:rPr lang="en-CA" dirty="0"/>
-              <a:t> module. </a:t>
+              <a:t> </a:t>
             </a:r>
           </a:p>
           <a:p>
@@ -9564,8 +9576,64 @@
               <a:t>Reusability</a:t>
             </a:r>
             <a:r>
+              <a:rPr lang="en-CA" dirty="0">
+                <a:solidFill>
+                  <a:srgbClr val="00FF00"/>
+                </a:solidFill>
+              </a:rPr>
+              <a:t>:</a:t>
+            </a:r>
+            <a:r>
               <a:rPr lang="en-CA" dirty="0"/>
-              <a:t>: Reuse functions across multiple projects (don’t rewrite the wheel!)</a:t>
+              <a:t> Reuse functions across multiple projects </a:t>
+            </a:r>
+            <a:r>
+              <a:rPr lang="en-CA" dirty="0">
+                <a:solidFill>
+                  <a:srgbClr val="00FF00"/>
+                </a:solidFill>
+              </a:rPr>
+              <a:t>(</a:t>
+            </a:r>
+            <a:r>
+              <a:rPr lang="en-CA" dirty="0"/>
+              <a:t>don</a:t>
+            </a:r>
+            <a:r>
+              <a:rPr lang="en-CA" dirty="0">
+                <a:solidFill>
+                  <a:schemeClr val="accent6"/>
+                </a:solidFill>
+              </a:rPr>
+              <a:t>’</a:t>
+            </a:r>
+            <a:r>
+              <a:rPr lang="en-CA" dirty="0"/>
+              <a:t>t rewrite the wheel</a:t>
+            </a:r>
+            <a:r>
+              <a:rPr lang="en-CA" dirty="0">
+                <a:solidFill>
+                  <a:schemeClr val="accent6"/>
+                </a:solidFill>
+              </a:rPr>
+              <a:t>!</a:t>
+            </a:r>
+            <a:r>
+              <a:rPr lang="en-CA" dirty="0">
+                <a:solidFill>
+                  <a:srgbClr val="00FF00"/>
+                </a:solidFill>
+              </a:rPr>
+              <a:t>)</a:t>
+            </a:r>
+            <a:r>
+              <a:rPr lang="en-CA" dirty="0">
+                <a:solidFill>
+                  <a:schemeClr val="accent6"/>
+                </a:solidFill>
+              </a:rPr>
+              <a:t>.</a:t>
             </a:r>
           </a:p>
           <a:p>
@@ -9575,7 +9643,7 @@
               <a:t>Now you can import </a:t>
             </a:r>
             <a:r>
-              <a:rPr lang="en-CA" dirty="0" err="1">
+              <a:rPr lang="en-CA" b="1" dirty="0" err="1">
                 <a:solidFill>
                   <a:srgbClr val="00FF00"/>
                 </a:solidFill>
@@ -9585,32 +9653,68 @@
               <a:t>dict_print</a:t>
             </a:r>
             <a:r>
+              <a:rPr lang="en-CA" b="1" dirty="0">
+                <a:solidFill>
+                  <a:srgbClr val="00FF00"/>
+                </a:solidFill>
+                <a:latin typeface="Courier New" panose="02070309020205020404" pitchFamily="49" charset="0"/>
+                <a:cs typeface="Courier New" panose="02070309020205020404" pitchFamily="49" charset="0"/>
+              </a:rPr>
+              <a:t> </a:t>
+            </a:r>
+            <a:r>
+              <a:rPr lang="en-CA" dirty="0"/>
+              <a:t>into any new python file</a:t>
+            </a:r>
+            <a:r>
               <a:rPr lang="en-CA" dirty="0">
                 <a:solidFill>
-                  <a:srgbClr val="00FF00"/>
-                </a:solidFill>
-                <a:latin typeface="Courier New" panose="02070309020205020404" pitchFamily="49" charset="0"/>
-                <a:cs typeface="Courier New" panose="02070309020205020404" pitchFamily="49" charset="0"/>
-              </a:rPr>
-              <a:t> </a:t>
+                  <a:schemeClr val="accent6"/>
+                </a:solidFill>
+              </a:rPr>
+              <a:t>,</a:t>
             </a:r>
             <a:r>
               <a:rPr lang="en-CA" dirty="0"/>
-              <a:t>into any new python file, instead of needing to copy and paste the function into each file to use it</a:t>
-            </a:r>
-          </a:p>
-          <a:p>
+              <a:t> instead of needing to copy and paste the function into each file to use it</a:t>
+            </a:r>
             <a:r>
               <a:rPr lang="en-CA" dirty="0">
                 <a:solidFill>
                   <a:schemeClr val="accent6"/>
                 </a:solidFill>
               </a:rPr>
+              <a:t>.</a:t>
+            </a:r>
+          </a:p>
+          <a:p>
+            <a:r>
+              <a:rPr lang="en-CA" dirty="0">
+                <a:solidFill>
+                  <a:schemeClr val="accent6"/>
+                </a:solidFill>
+              </a:rPr>
               <a:t>Maintainability</a:t>
             </a:r>
             <a:r>
+              <a:rPr lang="en-CA" dirty="0">
+                <a:solidFill>
+                  <a:srgbClr val="00FF00"/>
+                </a:solidFill>
+              </a:rPr>
+              <a:t>:</a:t>
+            </a:r>
+            <a:r>
               <a:rPr lang="en-CA" dirty="0"/>
-              <a:t>: Isolate functionality in separate files for easier updates</a:t>
+              <a:t> Isolate functionality in separate files for easier updates</a:t>
+            </a:r>
+            <a:r>
+              <a:rPr lang="en-CA" dirty="0">
+                <a:solidFill>
+                  <a:schemeClr val="accent6"/>
+                </a:solidFill>
+              </a:rPr>
+              <a:t>.</a:t>
             </a:r>
           </a:p>
           <a:p>
@@ -9620,7 +9724,7 @@
               <a:t>Improve your </a:t>
             </a:r>
             <a:r>
-              <a:rPr lang="en-CA" dirty="0">
+              <a:rPr lang="en-CA" b="1" dirty="0">
                 <a:solidFill>
                   <a:srgbClr val="00FF00"/>
                 </a:solidFill>
@@ -9633,19 +9737,43 @@
               <a:rPr lang="en-CA" dirty="0"/>
               <a:t> module or add more fancy printing functions to utils without breaking any of your existing files</a:t>
             </a:r>
-          </a:p>
-          <a:p>
             <a:r>
               <a:rPr lang="en-CA" dirty="0">
                 <a:solidFill>
                   <a:schemeClr val="accent6"/>
                 </a:solidFill>
               </a:rPr>
+              <a:t>.</a:t>
+            </a:r>
+          </a:p>
+          <a:p>
+            <a:r>
+              <a:rPr lang="en-CA" dirty="0">
+                <a:solidFill>
+                  <a:schemeClr val="accent6"/>
+                </a:solidFill>
+              </a:rPr>
               <a:t>Collaboration</a:t>
             </a:r>
             <a:r>
+              <a:rPr lang="en-CA" dirty="0">
+                <a:solidFill>
+                  <a:srgbClr val="00FF00"/>
+                </a:solidFill>
+              </a:rPr>
+              <a:t>:</a:t>
+            </a:r>
+            <a:r>
               <a:rPr lang="en-CA" dirty="0"/>
-              <a:t>: Multiple developers can work on different modules in parallel</a:t>
+              <a:t> Multiple developers can work on different modules in parallel</a:t>
+            </a:r>
+            <a:r>
+              <a:rPr lang="en-CA" dirty="0">
+                <a:solidFill>
+                  <a:schemeClr val="accent6"/>
+                </a:solidFill>
+              </a:rPr>
+              <a:t>.</a:t>
             </a:r>
           </a:p>
         </p:txBody>
@@ -9660,328 +9788,6 @@
   <p:clrMapOvr>
     <a:masterClrMapping/>
   </p:clrMapOvr>
-  <p:timing>
-    <p:tnLst>
-      <p:par>
-        <p:cTn id="1" dur="indefinite" restart="never" nodeType="tmRoot">
-          <p:childTnLst>
-            <p:seq concurrent="1" nextAc="seek">
-              <p:cTn id="2" dur="indefinite" nodeType="mainSeq">
-                <p:childTnLst>
-                  <p:par>
-                    <p:cTn id="3" fill="hold">
-                      <p:stCondLst>
-                        <p:cond delay="indefinite"/>
-                      </p:stCondLst>
-                      <p:childTnLst>
-                        <p:par>
-                          <p:cTn id="4" fill="hold">
-                            <p:stCondLst>
-                              <p:cond delay="0"/>
-                            </p:stCondLst>
-                            <p:childTnLst>
-                              <p:par>
-                                <p:cTn id="5" presetID="1" presetClass="entr" presetSubtype="0" fill="hold" grpId="0" nodeType="clickEffect">
-                                  <p:stCondLst>
-                                    <p:cond delay="0"/>
-                                  </p:stCondLst>
-                                  <p:childTnLst>
-                                    <p:set>
-                                      <p:cBhvr>
-                                        <p:cTn id="6" dur="1" fill="hold">
-                                          <p:stCondLst>
-                                            <p:cond delay="0"/>
-                                          </p:stCondLst>
-                                        </p:cTn>
-                                        <p:tgtEl>
-                                          <p:spTgt spid="3">
-                                            <p:txEl>
-                                              <p:pRg st="0" end="0"/>
-                                            </p:txEl>
-                                          </p:spTgt>
-                                        </p:tgtEl>
-                                        <p:attrNameLst>
-                                          <p:attrName>style.visibility</p:attrName>
-                                        </p:attrNameLst>
-                                      </p:cBhvr>
-                                      <p:to>
-                                        <p:strVal val="visible"/>
-                                      </p:to>
-                                    </p:set>
-                                  </p:childTnLst>
-                                </p:cTn>
-                              </p:par>
-                              <p:par>
-                                <p:cTn id="7" presetID="1" presetClass="entr" presetSubtype="0" fill="hold" grpId="0" nodeType="withEffect">
-                                  <p:stCondLst>
-                                    <p:cond delay="0"/>
-                                  </p:stCondLst>
-                                  <p:childTnLst>
-                                    <p:set>
-                                      <p:cBhvr>
-                                        <p:cTn id="8" dur="1" fill="hold">
-                                          <p:stCondLst>
-                                            <p:cond delay="0"/>
-                                          </p:stCondLst>
-                                        </p:cTn>
-                                        <p:tgtEl>
-                                          <p:spTgt spid="3">
-                                            <p:txEl>
-                                              <p:pRg st="1" end="1"/>
-                                            </p:txEl>
-                                          </p:spTgt>
-                                        </p:tgtEl>
-                                        <p:attrNameLst>
-                                          <p:attrName>style.visibility</p:attrName>
-                                        </p:attrNameLst>
-                                      </p:cBhvr>
-                                      <p:to>
-                                        <p:strVal val="visible"/>
-                                      </p:to>
-                                    </p:set>
-                                  </p:childTnLst>
-                                </p:cTn>
-                              </p:par>
-                            </p:childTnLst>
-                          </p:cTn>
-                        </p:par>
-                      </p:childTnLst>
-                    </p:cTn>
-                  </p:par>
-                  <p:par>
-                    <p:cTn id="9" fill="hold">
-                      <p:stCondLst>
-                        <p:cond delay="indefinite"/>
-                      </p:stCondLst>
-                      <p:childTnLst>
-                        <p:par>
-                          <p:cTn id="10" fill="hold">
-                            <p:stCondLst>
-                              <p:cond delay="0"/>
-                            </p:stCondLst>
-                            <p:childTnLst>
-                              <p:par>
-                                <p:cTn id="11" presetID="1" presetClass="entr" presetSubtype="0" fill="hold" grpId="0" nodeType="clickEffect">
-                                  <p:stCondLst>
-                                    <p:cond delay="0"/>
-                                  </p:stCondLst>
-                                  <p:childTnLst>
-                                    <p:set>
-                                      <p:cBhvr>
-                                        <p:cTn id="12" dur="1" fill="hold">
-                                          <p:stCondLst>
-                                            <p:cond delay="0"/>
-                                          </p:stCondLst>
-                                        </p:cTn>
-                                        <p:tgtEl>
-                                          <p:spTgt spid="3">
-                                            <p:txEl>
-                                              <p:pRg st="2" end="2"/>
-                                            </p:txEl>
-                                          </p:spTgt>
-                                        </p:tgtEl>
-                                        <p:attrNameLst>
-                                          <p:attrName>style.visibility</p:attrName>
-                                        </p:attrNameLst>
-                                      </p:cBhvr>
-                                      <p:to>
-                                        <p:strVal val="visible"/>
-                                      </p:to>
-                                    </p:set>
-                                  </p:childTnLst>
-                                </p:cTn>
-                              </p:par>
-                              <p:par>
-                                <p:cTn id="13" presetID="1" presetClass="entr" presetSubtype="0" fill="hold" grpId="0" nodeType="withEffect">
-                                  <p:stCondLst>
-                                    <p:cond delay="0"/>
-                                  </p:stCondLst>
-                                  <p:childTnLst>
-                                    <p:set>
-                                      <p:cBhvr>
-                                        <p:cTn id="14" dur="1" fill="hold">
-                                          <p:stCondLst>
-                                            <p:cond delay="0"/>
-                                          </p:stCondLst>
-                                        </p:cTn>
-                                        <p:tgtEl>
-                                          <p:spTgt spid="3">
-                                            <p:txEl>
-                                              <p:pRg st="3" end="3"/>
-                                            </p:txEl>
-                                          </p:spTgt>
-                                        </p:tgtEl>
-                                        <p:attrNameLst>
-                                          <p:attrName>style.visibility</p:attrName>
-                                        </p:attrNameLst>
-                                      </p:cBhvr>
-                                      <p:to>
-                                        <p:strVal val="visible"/>
-                                      </p:to>
-                                    </p:set>
-                                  </p:childTnLst>
-                                </p:cTn>
-                              </p:par>
-                            </p:childTnLst>
-                          </p:cTn>
-                        </p:par>
-                      </p:childTnLst>
-                    </p:cTn>
-                  </p:par>
-                  <p:par>
-                    <p:cTn id="15" fill="hold">
-                      <p:stCondLst>
-                        <p:cond delay="indefinite"/>
-                      </p:stCondLst>
-                      <p:childTnLst>
-                        <p:par>
-                          <p:cTn id="16" fill="hold">
-                            <p:stCondLst>
-                              <p:cond delay="0"/>
-                            </p:stCondLst>
-                            <p:childTnLst>
-                              <p:par>
-                                <p:cTn id="17" presetID="1" presetClass="entr" presetSubtype="0" fill="hold" grpId="0" nodeType="clickEffect">
-                                  <p:stCondLst>
-                                    <p:cond delay="0"/>
-                                  </p:stCondLst>
-                                  <p:childTnLst>
-                                    <p:set>
-                                      <p:cBhvr>
-                                        <p:cTn id="18" dur="1" fill="hold">
-                                          <p:stCondLst>
-                                            <p:cond delay="0"/>
-                                          </p:stCondLst>
-                                        </p:cTn>
-                                        <p:tgtEl>
-                                          <p:spTgt spid="3">
-                                            <p:txEl>
-                                              <p:pRg st="4" end="4"/>
-                                            </p:txEl>
-                                          </p:spTgt>
-                                        </p:tgtEl>
-                                        <p:attrNameLst>
-                                          <p:attrName>style.visibility</p:attrName>
-                                        </p:attrNameLst>
-                                      </p:cBhvr>
-                                      <p:to>
-                                        <p:strVal val="visible"/>
-                                      </p:to>
-                                    </p:set>
-                                  </p:childTnLst>
-                                </p:cTn>
-                              </p:par>
-                              <p:par>
-                                <p:cTn id="19" presetID="1" presetClass="entr" presetSubtype="0" fill="hold" grpId="0" nodeType="withEffect">
-                                  <p:stCondLst>
-                                    <p:cond delay="0"/>
-                                  </p:stCondLst>
-                                  <p:childTnLst>
-                                    <p:set>
-                                      <p:cBhvr>
-                                        <p:cTn id="20" dur="1" fill="hold">
-                                          <p:stCondLst>
-                                            <p:cond delay="0"/>
-                                          </p:stCondLst>
-                                        </p:cTn>
-                                        <p:tgtEl>
-                                          <p:spTgt spid="3">
-                                            <p:txEl>
-                                              <p:pRg st="5" end="5"/>
-                                            </p:txEl>
-                                          </p:spTgt>
-                                        </p:tgtEl>
-                                        <p:attrNameLst>
-                                          <p:attrName>style.visibility</p:attrName>
-                                        </p:attrNameLst>
-                                      </p:cBhvr>
-                                      <p:to>
-                                        <p:strVal val="visible"/>
-                                      </p:to>
-                                    </p:set>
-                                  </p:childTnLst>
-                                </p:cTn>
-                              </p:par>
-                            </p:childTnLst>
-                          </p:cTn>
-                        </p:par>
-                      </p:childTnLst>
-                    </p:cTn>
-                  </p:par>
-                  <p:par>
-                    <p:cTn id="21" fill="hold">
-                      <p:stCondLst>
-                        <p:cond delay="indefinite"/>
-                      </p:stCondLst>
-                      <p:childTnLst>
-                        <p:par>
-                          <p:cTn id="22" fill="hold">
-                            <p:stCondLst>
-                              <p:cond delay="0"/>
-                            </p:stCondLst>
-                            <p:childTnLst>
-                              <p:par>
-                                <p:cTn id="23" presetID="1" presetClass="entr" presetSubtype="0" fill="hold" grpId="0" nodeType="clickEffect">
-                                  <p:stCondLst>
-                                    <p:cond delay="0"/>
-                                  </p:stCondLst>
-                                  <p:childTnLst>
-                                    <p:set>
-                                      <p:cBhvr>
-                                        <p:cTn id="24" dur="1" fill="hold">
-                                          <p:stCondLst>
-                                            <p:cond delay="0"/>
-                                          </p:stCondLst>
-                                        </p:cTn>
-                                        <p:tgtEl>
-                                          <p:spTgt spid="3">
-                                            <p:txEl>
-                                              <p:pRg st="6" end="6"/>
-                                            </p:txEl>
-                                          </p:spTgt>
-                                        </p:tgtEl>
-                                        <p:attrNameLst>
-                                          <p:attrName>style.visibility</p:attrName>
-                                        </p:attrNameLst>
-                                      </p:cBhvr>
-                                      <p:to>
-                                        <p:strVal val="visible"/>
-                                      </p:to>
-                                    </p:set>
-                                  </p:childTnLst>
-                                </p:cTn>
-                              </p:par>
-                            </p:childTnLst>
-                          </p:cTn>
-                        </p:par>
-                      </p:childTnLst>
-                    </p:cTn>
-                  </p:par>
-                </p:childTnLst>
-              </p:cTn>
-              <p:prevCondLst>
-                <p:cond evt="onPrev" delay="0">
-                  <p:tgtEl>
-                    <p:sldTgt/>
-                  </p:tgtEl>
-                </p:cond>
-              </p:prevCondLst>
-              <p:nextCondLst>
-                <p:cond evt="onNext" delay="0">
-                  <p:tgtEl>
-                    <p:sldTgt/>
-                  </p:tgtEl>
-                </p:cond>
-              </p:nextCondLst>
-            </p:seq>
-          </p:childTnLst>
-        </p:cTn>
-      </p:par>
-    </p:tnLst>
-    <p:bldLst>
-      <p:bldP spid="3" grpId="0" build="p"/>
-    </p:bldLst>
-  </p:timing>
 </p:sld>
 </file>
 
@@ -12557,14 +12363,14 @@
           <p:nvPr>
             <p:extLst>
               <p:ext uri="{D42A27DB-BD31-4B8C-83A1-F6EECF244321}">
-                <p14:modId xmlns:p14="http://schemas.microsoft.com/office/powerpoint/2010/main" val="1846793394"/>
+                <p14:modId xmlns:p14="http://schemas.microsoft.com/office/powerpoint/2010/main" val="255484982"/>
               </p:ext>
             </p:extLst>
           </p:nvPr>
         </p:nvGraphicFramePr>
         <p:xfrm>
-          <a:off x="248505" y="1475772"/>
-          <a:ext cx="10241280" cy="5140960"/>
+          <a:off x="248505" y="1728437"/>
+          <a:ext cx="10241280" cy="4592320"/>
         </p:xfrm>
         <a:graphic>
           <a:graphicData uri="http://schemas.openxmlformats.org/drawingml/2006/table">
@@ -12753,11 +12559,13 @@
                         </a:spcAft>
                       </a:pPr>
                       <a:r>
-                        <a:rPr lang="en-US" sz="1600" dirty="0">
+                        <a:rPr lang="en-US" sz="1400" b="1" dirty="0">
                           <a:solidFill>
                             <a:srgbClr val="0070C0"/>
                           </a:solidFill>
                           <a:effectLst/>
+                          <a:latin typeface="Courier New" panose="02070309020205020404" pitchFamily="49" charset="0"/>
+                          <a:cs typeface="Courier New" panose="02070309020205020404" pitchFamily="49" charset="0"/>
                         </a:rPr>
                         <a:t>myfile = open(filename, 'r')</a:t>
                       </a:r>
@@ -12772,29 +12580,35 @@
                         </a:spcAft>
                       </a:pPr>
                       <a:r>
-                        <a:rPr lang="en-US" sz="1600" dirty="0">
+                        <a:rPr lang="en-US" sz="1400" b="1" dirty="0">
                           <a:solidFill>
                             <a:srgbClr val="0070C0"/>
                           </a:solidFill>
                           <a:effectLst/>
+                          <a:latin typeface="Courier New" panose="02070309020205020404" pitchFamily="49" charset="0"/>
+                          <a:cs typeface="Courier New" panose="02070309020205020404" pitchFamily="49" charset="0"/>
                         </a:rPr>
                         <a:t>contents = </a:t>
                       </a:r>
                       <a:r>
-                        <a:rPr lang="en-US" sz="1600" dirty="0" err="1">
+                        <a:rPr lang="en-US" sz="1400" b="1" dirty="0" err="1">
                           <a:solidFill>
                             <a:srgbClr val="0070C0"/>
                           </a:solidFill>
                           <a:effectLst/>
+                          <a:latin typeface="Courier New" panose="02070309020205020404" pitchFamily="49" charset="0"/>
+                          <a:cs typeface="Courier New" panose="02070309020205020404" pitchFamily="49" charset="0"/>
                         </a:rPr>
                         <a:t>myfile.read</a:t>
                       </a:r>
                       <a:r>
-                        <a:rPr lang="en-US" sz="1600" dirty="0">
+                        <a:rPr lang="en-US" sz="1400" b="1" dirty="0">
                           <a:solidFill>
                             <a:srgbClr val="0070C0"/>
                           </a:solidFill>
                           <a:effectLst/>
+                          <a:latin typeface="Courier New" panose="02070309020205020404" pitchFamily="49" charset="0"/>
+                          <a:cs typeface="Courier New" panose="02070309020205020404" pitchFamily="49" charset="0"/>
                         </a:rPr>
                         <a:t>()</a:t>
                       </a:r>
@@ -12809,15 +12623,28 @@
                         </a:spcAft>
                       </a:pPr>
                       <a:r>
-                        <a:rPr lang="en-US" sz="1600" dirty="0">
+                        <a:rPr lang="en-US" sz="1400" b="1" dirty="0" err="1">
                           <a:solidFill>
                             <a:srgbClr val="0070C0"/>
                           </a:solidFill>
                           <a:effectLst/>
+                          <a:latin typeface="Courier New" panose="02070309020205020404" pitchFamily="49" charset="0"/>
+                          <a:cs typeface="Courier New" panose="02070309020205020404" pitchFamily="49" charset="0"/>
                         </a:rPr>
-                        <a:t>myfile.close()</a:t>
+                        <a:t>myfile.close</a:t>
                       </a:r>
-                      <a:endParaRPr lang="en-US" sz="1600" dirty="0">
+                      <a:r>
+                        <a:rPr lang="en-US" sz="1400" b="1" dirty="0">
+                          <a:solidFill>
+                            <a:srgbClr val="0070C0"/>
+                          </a:solidFill>
+                          <a:effectLst/>
+                          <a:latin typeface="Courier New" panose="02070309020205020404" pitchFamily="49" charset="0"/>
+                          <a:cs typeface="Courier New" panose="02070309020205020404" pitchFamily="49" charset="0"/>
+                        </a:rPr>
+                        <a:t>()</a:t>
+                      </a:r>
+                      <a:endParaRPr lang="en-US" sz="1400" b="1" dirty="0">
                         <a:solidFill>
                           <a:srgbClr val="0070C0"/>
                         </a:solidFill>
@@ -12934,13 +12761,26 @@
                         </a:spcAft>
                       </a:pPr>
                       <a:r>
-                        <a:rPr lang="en-US" sz="1600" dirty="0">
+                        <a:rPr lang="en-US" sz="1400" b="1" dirty="0" err="1">
                           <a:solidFill>
                             <a:srgbClr val="0070C0"/>
                           </a:solidFill>
                           <a:effectLst/>
+                          <a:latin typeface="Courier New" panose="02070309020205020404" pitchFamily="49" charset="0"/>
+                          <a:cs typeface="Courier New" panose="02070309020205020404" pitchFamily="49" charset="0"/>
                         </a:rPr>
-                        <a:t>myfile = open(filename, 'r')</a:t>
+                        <a:t>myfile</a:t>
+                      </a:r>
+                      <a:r>
+                        <a:rPr lang="en-US" sz="1400" b="1" dirty="0">
+                          <a:solidFill>
+                            <a:srgbClr val="0070C0"/>
+                          </a:solidFill>
+                          <a:effectLst/>
+                          <a:latin typeface="Courier New" panose="02070309020205020404" pitchFamily="49" charset="0"/>
+                          <a:cs typeface="Courier New" panose="02070309020205020404" pitchFamily="49" charset="0"/>
+                        </a:rPr>
+                        <a:t> = open(filename, 'r')</a:t>
                       </a:r>
                     </a:p>
                     <a:p>
@@ -12953,46 +12793,56 @@
                         </a:spcAft>
                       </a:pPr>
                       <a:r>
-                        <a:rPr lang="en-US" sz="1600" dirty="0">
+                        <a:rPr lang="en-US" sz="1400" b="1" dirty="0">
                           <a:solidFill>
                             <a:srgbClr val="0070C0"/>
                           </a:solidFill>
                           <a:effectLst/>
+                          <a:latin typeface="Courier New" panose="02070309020205020404" pitchFamily="49" charset="0"/>
+                          <a:cs typeface="Courier New" panose="02070309020205020404" pitchFamily="49" charset="0"/>
                         </a:rPr>
                         <a:t>contents = ''</a:t>
                       </a:r>
                       <a:br>
-                        <a:rPr lang="en-US" sz="1600" dirty="0">
+                        <a:rPr lang="en-US" sz="1400" b="1" dirty="0">
                           <a:solidFill>
                             <a:srgbClr val="0070C0"/>
                           </a:solidFill>
                           <a:effectLst/>
+                          <a:latin typeface="Courier New" panose="02070309020205020404" pitchFamily="49" charset="0"/>
+                          <a:cs typeface="Courier New" panose="02070309020205020404" pitchFamily="49" charset="0"/>
                         </a:rPr>
                       </a:br>
                       <a:r>
-                        <a:rPr lang="en-US" sz="1600" dirty="0">
+                        <a:rPr lang="en-US" sz="1400" b="1" dirty="0">
                           <a:solidFill>
                             <a:srgbClr val="0070C0"/>
                           </a:solidFill>
                           <a:effectLst/>
+                          <a:latin typeface="Courier New" panose="02070309020205020404" pitchFamily="49" charset="0"/>
+                          <a:cs typeface="Courier New" panose="02070309020205020404" pitchFamily="49" charset="0"/>
                         </a:rPr>
                         <a:t>line = </a:t>
                       </a:r>
                       <a:r>
-                        <a:rPr lang="en-US" sz="1600" dirty="0" err="1">
+                        <a:rPr lang="en-US" sz="1400" b="1" dirty="0" err="1">
                           <a:solidFill>
                             <a:srgbClr val="0070C0"/>
                           </a:solidFill>
                           <a:effectLst/>
+                          <a:latin typeface="Courier New" panose="02070309020205020404" pitchFamily="49" charset="0"/>
+                          <a:cs typeface="Courier New" panose="02070309020205020404" pitchFamily="49" charset="0"/>
                         </a:rPr>
                         <a:t>myfile.readline</a:t>
                       </a:r>
                       <a:r>
-                        <a:rPr lang="en-US" sz="1600" dirty="0">
+                        <a:rPr lang="en-US" sz="1400" b="1" dirty="0">
                           <a:solidFill>
                             <a:srgbClr val="0070C0"/>
                           </a:solidFill>
                           <a:effectLst/>
+                          <a:latin typeface="Courier New" panose="02070309020205020404" pitchFamily="49" charset="0"/>
+                          <a:cs typeface="Courier New" panose="02070309020205020404" pitchFamily="49" charset="0"/>
                         </a:rPr>
                         <a:t>()</a:t>
                       </a:r>
@@ -13007,11 +12857,13 @@
                         </a:spcAft>
                       </a:pPr>
                       <a:r>
-                        <a:rPr lang="en-US" sz="1600" dirty="0">
+                        <a:rPr lang="en-US" sz="1400" b="1" dirty="0">
                           <a:solidFill>
                             <a:srgbClr val="0070C0"/>
                           </a:solidFill>
                           <a:effectLst/>
+                          <a:latin typeface="Courier New" panose="02070309020205020404" pitchFamily="49" charset="0"/>
+                          <a:cs typeface="Courier New" panose="02070309020205020404" pitchFamily="49" charset="0"/>
                         </a:rPr>
                         <a:t>while line != '':</a:t>
                       </a:r>
@@ -13035,11 +12887,13 @@
                         <a:defRPr/>
                       </a:pPr>
                       <a:r>
-                        <a:rPr lang="en-US" sz="1600" dirty="0">
+                        <a:rPr lang="en-US" sz="1400" b="1" dirty="0">
                           <a:solidFill>
                             <a:srgbClr val="0070C0"/>
                           </a:solidFill>
                           <a:effectLst/>
+                          <a:latin typeface="Courier New" panose="02070309020205020404" pitchFamily="49" charset="0"/>
+                          <a:cs typeface="Courier New" panose="02070309020205020404" pitchFamily="49" charset="0"/>
                         </a:rPr>
                         <a:t>    contents += line</a:t>
                       </a:r>
@@ -13063,67 +12917,70 @@
                         <a:defRPr/>
                       </a:pPr>
                       <a:r>
-                        <a:rPr lang="en-US" sz="1600" dirty="0">
+                        <a:rPr lang="en-US" sz="1400" b="1" dirty="0">
                           <a:solidFill>
                             <a:srgbClr val="0070C0"/>
                           </a:solidFill>
                           <a:effectLst/>
+                          <a:latin typeface="Courier New" panose="02070309020205020404" pitchFamily="49" charset="0"/>
+                          <a:cs typeface="Courier New" panose="02070309020205020404" pitchFamily="49" charset="0"/>
                         </a:rPr>
                         <a:t>    line = </a:t>
                       </a:r>
                       <a:r>
-                        <a:rPr lang="en-US" sz="1600" dirty="0" err="1">
+                        <a:rPr lang="en-US" sz="1400" b="1" dirty="0" err="1">
                           <a:solidFill>
                             <a:srgbClr val="0070C0"/>
                           </a:solidFill>
                           <a:effectLst/>
+                          <a:latin typeface="Courier New" panose="02070309020205020404" pitchFamily="49" charset="0"/>
+                          <a:cs typeface="Courier New" panose="02070309020205020404" pitchFamily="49" charset="0"/>
                         </a:rPr>
                         <a:t>myfile.readline</a:t>
                       </a:r>
                       <a:r>
-                        <a:rPr lang="en-US" sz="1600" dirty="0">
+                        <a:rPr lang="en-US" sz="1400" b="1" dirty="0">
                           <a:solidFill>
                             <a:srgbClr val="0070C0"/>
                           </a:solidFill>
                           <a:effectLst/>
+                          <a:latin typeface="Courier New" panose="02070309020205020404" pitchFamily="49" charset="0"/>
+                          <a:cs typeface="Courier New" panose="02070309020205020404" pitchFamily="49" charset="0"/>
                         </a:rPr>
                         <a:t>()</a:t>
                       </a:r>
                       <a:br>
-                        <a:rPr lang="en-US" sz="1600" dirty="0">
+                        <a:rPr lang="en-US" sz="1400" b="1" dirty="0">
                           <a:solidFill>
                             <a:srgbClr val="0070C0"/>
                           </a:solidFill>
                           <a:effectLst/>
+                          <a:latin typeface="Courier New" panose="02070309020205020404" pitchFamily="49" charset="0"/>
+                          <a:cs typeface="Courier New" panose="02070309020205020404" pitchFamily="49" charset="0"/>
                         </a:rPr>
                       </a:br>
                       <a:r>
-                        <a:rPr lang="en-US" sz="1600" dirty="0" err="1">
+                        <a:rPr lang="en-US" sz="1400" b="1" dirty="0" err="1">
                           <a:solidFill>
                             <a:srgbClr val="0070C0"/>
                           </a:solidFill>
                           <a:effectLst/>
+                          <a:latin typeface="Courier New" panose="02070309020205020404" pitchFamily="49" charset="0"/>
+                          <a:cs typeface="Courier New" panose="02070309020205020404" pitchFamily="49" charset="0"/>
                         </a:rPr>
                         <a:t>myfile.close</a:t>
                       </a:r>
                       <a:r>
-                        <a:rPr lang="en-US" sz="1600" dirty="0">
+                        <a:rPr lang="en-US" sz="1400" b="1" dirty="0">
                           <a:solidFill>
                             <a:srgbClr val="0070C0"/>
                           </a:solidFill>
                           <a:effectLst/>
+                          <a:latin typeface="Courier New" panose="02070309020205020404" pitchFamily="49" charset="0"/>
+                          <a:cs typeface="Courier New" panose="02070309020205020404" pitchFamily="49" charset="0"/>
                         </a:rPr>
                         <a:t>()</a:t>
                       </a:r>
-                      <a:endParaRPr lang="en-US" sz="1600" dirty="0">
-                        <a:solidFill>
-                          <a:srgbClr val="0070C0"/>
-                        </a:solidFill>
-                        <a:effectLst/>
-                        <a:latin typeface="Courier New" panose="02070309020205020404" pitchFamily="49" charset="0"/>
-                        <a:ea typeface="MS Mincho" panose="02020609040205080304" pitchFamily="49" charset="-128"/>
-                        <a:cs typeface="Courier New" panose="02070309020205020404" pitchFamily="49" charset="0"/>
-                      </a:endParaRPr>
                     </a:p>
                   </a:txBody>
                   <a:tcPr marL="50800" marR="50800" marT="50800" marB="50800"/>
@@ -13214,11 +13071,13 @@
                         </a:spcAft>
                       </a:pPr>
                       <a:r>
-                        <a:rPr lang="en-US" sz="1600" dirty="0">
+                        <a:rPr lang="en-US" sz="1400" b="1" dirty="0">
                           <a:solidFill>
                             <a:srgbClr val="0070C0"/>
                           </a:solidFill>
                           <a:effectLst/>
+                          <a:latin typeface="Courier New" panose="02070309020205020404" pitchFamily="49" charset="0"/>
+                          <a:cs typeface="Courier New" panose="02070309020205020404" pitchFamily="49" charset="0"/>
                         </a:rPr>
                         <a:t>myfile = open(filename, 'r')</a:t>
                       </a:r>
@@ -13233,11 +13092,13 @@
                         </a:spcAft>
                       </a:pPr>
                       <a:r>
-                        <a:rPr lang="en-US" sz="1600" dirty="0">
+                        <a:rPr lang="en-US" sz="1400" b="1" dirty="0">
                           <a:solidFill>
                             <a:srgbClr val="0070C0"/>
                           </a:solidFill>
                           <a:effectLst/>
+                          <a:latin typeface="Courier New" panose="02070309020205020404" pitchFamily="49" charset="0"/>
+                          <a:cs typeface="Courier New" panose="02070309020205020404" pitchFamily="49" charset="0"/>
                         </a:rPr>
                         <a:t>contents = ''</a:t>
                       </a:r>
@@ -13252,28 +13113,34 @@
                         </a:spcAft>
                       </a:pPr>
                       <a:r>
-                        <a:rPr lang="en-US" sz="1600" dirty="0">
+                        <a:rPr lang="en-US" sz="1400" b="1" dirty="0">
                           <a:solidFill>
                             <a:srgbClr val="0070C0"/>
                           </a:solidFill>
                           <a:effectLst/>
+                          <a:latin typeface="Courier New" panose="02070309020205020404" pitchFamily="49" charset="0"/>
+                          <a:cs typeface="Courier New" panose="02070309020205020404" pitchFamily="49" charset="0"/>
                         </a:rPr>
                         <a:t>for line in myfile:</a:t>
                       </a:r>
                       <a:br>
-                        <a:rPr lang="en-US" sz="1600" dirty="0">
+                        <a:rPr lang="en-US" sz="1400" b="1" dirty="0">
                           <a:solidFill>
                             <a:srgbClr val="0070C0"/>
                           </a:solidFill>
                           <a:effectLst/>
+                          <a:latin typeface="Courier New" panose="02070309020205020404" pitchFamily="49" charset="0"/>
+                          <a:cs typeface="Courier New" panose="02070309020205020404" pitchFamily="49" charset="0"/>
                         </a:rPr>
                       </a:br>
                       <a:r>
-                        <a:rPr lang="en-US" sz="1600" dirty="0">
+                        <a:rPr lang="en-US" sz="1400" b="1" dirty="0">
                           <a:solidFill>
                             <a:srgbClr val="0070C0"/>
                           </a:solidFill>
                           <a:effectLst/>
+                          <a:latin typeface="Courier New" panose="02070309020205020404" pitchFamily="49" charset="0"/>
+                          <a:cs typeface="Courier New" panose="02070309020205020404" pitchFamily="49" charset="0"/>
                         </a:rPr>
                         <a:t>    contents += line</a:t>
                       </a:r>
@@ -13288,15 +13155,28 @@
                         </a:spcAft>
                       </a:pPr>
                       <a:r>
-                        <a:rPr lang="en-US" sz="1600" dirty="0">
+                        <a:rPr lang="en-US" sz="1400" b="1" dirty="0" err="1">
                           <a:solidFill>
                             <a:srgbClr val="0070C0"/>
                           </a:solidFill>
                           <a:effectLst/>
+                          <a:latin typeface="Courier New" panose="02070309020205020404" pitchFamily="49" charset="0"/>
+                          <a:cs typeface="Courier New" panose="02070309020205020404" pitchFamily="49" charset="0"/>
                         </a:rPr>
-                        <a:t>myfile.close()</a:t>
+                        <a:t>myfile.close</a:t>
                       </a:r>
-                      <a:endParaRPr lang="en-US" sz="1600" dirty="0">
+                      <a:r>
+                        <a:rPr lang="en-US" sz="1400" b="1" dirty="0">
+                          <a:solidFill>
+                            <a:srgbClr val="0070C0"/>
+                          </a:solidFill>
+                          <a:effectLst/>
+                          <a:latin typeface="Courier New" panose="02070309020205020404" pitchFamily="49" charset="0"/>
+                          <a:cs typeface="Courier New" panose="02070309020205020404" pitchFamily="49" charset="0"/>
+                        </a:rPr>
+                        <a:t>()</a:t>
+                      </a:r>
+                      <a:endParaRPr lang="en-US" sz="1400" b="1" dirty="0">
                         <a:solidFill>
                           <a:srgbClr val="0070C0"/>
                         </a:solidFill>
@@ -13413,46 +13293,56 @@
                         </a:spcAft>
                       </a:pPr>
                       <a:r>
-                        <a:rPr lang="en-US" sz="1600" dirty="0">
+                        <a:rPr lang="en-US" sz="1400" b="1" dirty="0">
                           <a:solidFill>
                             <a:srgbClr val="0070C0"/>
                           </a:solidFill>
                           <a:effectLst/>
+                          <a:latin typeface="Courier New" panose="02070309020205020404" pitchFamily="49" charset="0"/>
+                          <a:cs typeface="Courier New" panose="02070309020205020404" pitchFamily="49" charset="0"/>
                         </a:rPr>
                         <a:t>myfile = open(filename, 'r')</a:t>
                       </a:r>
                       <a:br>
-                        <a:rPr lang="en-US" sz="1600" dirty="0">
+                        <a:rPr lang="en-US" sz="1400" b="1" dirty="0">
                           <a:solidFill>
                             <a:srgbClr val="0070C0"/>
                           </a:solidFill>
                           <a:effectLst/>
+                          <a:latin typeface="Courier New" panose="02070309020205020404" pitchFamily="49" charset="0"/>
+                          <a:cs typeface="Courier New" panose="02070309020205020404" pitchFamily="49" charset="0"/>
                         </a:rPr>
                       </a:br>
                       <a:r>
-                        <a:rPr lang="en-US" sz="1600" dirty="0">
+                        <a:rPr lang="en-US" sz="1400" b="1" dirty="0">
                           <a:solidFill>
                             <a:srgbClr val="0070C0"/>
                           </a:solidFill>
                           <a:effectLst/>
+                          <a:latin typeface="Courier New" panose="02070309020205020404" pitchFamily="49" charset="0"/>
+                          <a:cs typeface="Courier New" panose="02070309020205020404" pitchFamily="49" charset="0"/>
                         </a:rPr>
                         <a:t>lines = </a:t>
                       </a:r>
                       <a:r>
-                        <a:rPr lang="en-US" sz="1600" dirty="0" err="1">
+                        <a:rPr lang="en-US" sz="1400" b="1" dirty="0" err="1">
                           <a:solidFill>
                             <a:srgbClr val="0070C0"/>
                           </a:solidFill>
                           <a:effectLst/>
+                          <a:latin typeface="Courier New" panose="02070309020205020404" pitchFamily="49" charset="0"/>
+                          <a:cs typeface="Courier New" panose="02070309020205020404" pitchFamily="49" charset="0"/>
                         </a:rPr>
                         <a:t>myfile.readlines</a:t>
                       </a:r>
                       <a:r>
-                        <a:rPr lang="en-US" sz="1600" dirty="0">
+                        <a:rPr lang="en-US" sz="1400" b="1" dirty="0">
                           <a:solidFill>
                             <a:srgbClr val="0070C0"/>
                           </a:solidFill>
                           <a:effectLst/>
+                          <a:latin typeface="Courier New" panose="02070309020205020404" pitchFamily="49" charset="0"/>
+                          <a:cs typeface="Courier New" panose="02070309020205020404" pitchFamily="49" charset="0"/>
                         </a:rPr>
                         <a:t>()</a:t>
                       </a:r>
@@ -13467,15 +13357,28 @@
                         </a:spcAft>
                       </a:pPr>
                       <a:r>
-                        <a:rPr lang="en-US" sz="1600" dirty="0">
+                        <a:rPr lang="en-US" sz="1400" b="1" dirty="0" err="1">
                           <a:solidFill>
                             <a:srgbClr val="0070C0"/>
                           </a:solidFill>
                           <a:effectLst/>
+                          <a:latin typeface="Courier New" panose="02070309020205020404" pitchFamily="49" charset="0"/>
+                          <a:cs typeface="Courier New" panose="02070309020205020404" pitchFamily="49" charset="0"/>
                         </a:rPr>
-                        <a:t>myfile.close()</a:t>
+                        <a:t>myfile.close</a:t>
                       </a:r>
-                      <a:endParaRPr lang="en-US" sz="1600" dirty="0">
+                      <a:r>
+                        <a:rPr lang="en-US" sz="1400" b="1" dirty="0">
+                          <a:solidFill>
+                            <a:srgbClr val="0070C0"/>
+                          </a:solidFill>
+                          <a:effectLst/>
+                          <a:latin typeface="Courier New" panose="02070309020205020404" pitchFamily="49" charset="0"/>
+                          <a:cs typeface="Courier New" panose="02070309020205020404" pitchFamily="49" charset="0"/>
+                        </a:rPr>
+                        <a:t>()</a:t>
+                      </a:r>
+                      <a:endParaRPr lang="en-US" sz="1400" b="1" dirty="0">
                         <a:solidFill>
                           <a:srgbClr val="0070C0"/>
                         </a:solidFill>
@@ -13543,8 +13446,8 @@
         </p:nvSpPr>
         <p:spPr>
           <a:xfrm>
-            <a:off x="10613746" y="4493794"/>
-            <a:ext cx="609600" cy="2075448"/>
+            <a:off x="10613746" y="4457703"/>
+            <a:ext cx="609600" cy="1816768"/>
           </a:xfrm>
           <a:prstGeom prst="rightBrace">
             <a:avLst>
@@ -13595,8 +13498,8 @@
         </p:nvSpPr>
         <p:spPr>
           <a:xfrm>
-            <a:off x="10610590" y="1882941"/>
-            <a:ext cx="609600" cy="2532647"/>
+            <a:off x="10610590" y="2135606"/>
+            <a:ext cx="609600" cy="2243891"/>
           </a:xfrm>
           <a:prstGeom prst="rightBrace">
             <a:avLst>
@@ -13647,7 +13550,7 @@
         </p:nvSpPr>
         <p:spPr>
           <a:xfrm rot="5400000">
-            <a:off x="10978938" y="5263892"/>
+            <a:off x="10978938" y="5107480"/>
             <a:ext cx="1357166" cy="523220"/>
           </a:xfrm>
           <a:prstGeom prst="rect">
@@ -13704,7 +13607,7 @@
         </p:nvSpPr>
         <p:spPr>
           <a:xfrm rot="5400000">
-            <a:off x="10898909" y="2892823"/>
+            <a:off x="10898909" y="2989078"/>
             <a:ext cx="1465466" cy="523220"/>
           </a:xfrm>
           <a:prstGeom prst="rect">
@@ -14158,9 +14061,9 @@
               <a:t>Every call on function </a:t>
             </a:r>
             <a:r>
-              <a:rPr lang="en-US" dirty="0">
-                <a:solidFill>
-                  <a:schemeClr val="accent6"/>
+              <a:rPr lang="en-US" b="1" dirty="0">
+                <a:solidFill>
+                  <a:srgbClr val="00FF00"/>
                 </a:solidFill>
                 <a:latin typeface="Courier New" panose="02070309020205020404" pitchFamily="49" charset="0"/>
                 <a:cs typeface="Courier New" panose="02070309020205020404" pitchFamily="49" charset="0"/>
@@ -14172,17 +14075,21 @@
               <a:t> should have an accompanying call on the method </a:t>
             </a:r>
             <a:r>
+              <a:rPr lang="en-US" b="1" dirty="0">
+                <a:solidFill>
+                  <a:srgbClr val="00FF00"/>
+                </a:solidFill>
+                <a:latin typeface="Courier New" panose="02070309020205020404" pitchFamily="49" charset="0"/>
+                <a:cs typeface="Courier New" panose="02070309020205020404" pitchFamily="49" charset="0"/>
+              </a:rPr>
+              <a:t>close</a:t>
+            </a:r>
+            <a:r>
               <a:rPr lang="en-US" dirty="0">
                 <a:solidFill>
                   <a:schemeClr val="accent6"/>
                 </a:solidFill>
-                <a:latin typeface="Courier New" panose="02070309020205020404" pitchFamily="49" charset="0"/>
-                <a:cs typeface="Courier New" panose="02070309020205020404" pitchFamily="49" charset="0"/>
-              </a:rPr>
-              <a:t>close</a:t>
-            </a:r>
-            <a:r>
-              <a:rPr lang="en-US" dirty="0"/>
+              </a:rPr>
               <a:t>.</a:t>
             </a:r>
           </a:p>
@@ -14200,18 +14107,38 @@
               <a:t>Python provides a statement </a:t>
             </a:r>
             <a:r>
+              <a:rPr lang="en-US" b="1" dirty="0">
+                <a:solidFill>
+                  <a:srgbClr val="00FF00"/>
+                </a:solidFill>
+                <a:latin typeface="Courier New" panose="02070309020205020404" pitchFamily="49" charset="0"/>
+                <a:cs typeface="Courier New" panose="02070309020205020404" pitchFamily="49" charset="0"/>
+              </a:rPr>
+              <a:t>with</a:t>
+            </a:r>
+            <a:r>
               <a:rPr lang="en-US" dirty="0">
                 <a:solidFill>
                   <a:schemeClr val="accent6"/>
                 </a:solidFill>
-                <a:latin typeface="Courier New" panose="02070309020205020404" pitchFamily="49" charset="0"/>
-                <a:cs typeface="Courier New" panose="02070309020205020404" pitchFamily="49" charset="0"/>
-              </a:rPr>
-              <a:t>with</a:t>
+              </a:rPr>
+              <a:t>,</a:t>
             </a:r>
             <a:r>
               <a:rPr lang="en-US" dirty="0"/>
-              <a:t>, which automatically closes the file when the end of with block is reached. </a:t>
+              <a:t> which automatically closes the file when the end of with block is reached</a:t>
+            </a:r>
+            <a:r>
+              <a:rPr lang="en-US" dirty="0">
+                <a:solidFill>
+                  <a:schemeClr val="accent6"/>
+                </a:solidFill>
+              </a:rPr>
+              <a:t>.</a:t>
+            </a:r>
+            <a:r>
+              <a:rPr lang="en-US" dirty="0"/>
+              <a:t> </a:t>
             </a:r>
           </a:p>
           <a:p>
@@ -14225,7 +14152,15 @@
             </a:pPr>
             <a:r>
               <a:rPr lang="en-US" dirty="0"/>
-              <a:t>The general form of a with statement is as follows:</a:t>
+              <a:t>The general form of a with statement is as follows</a:t>
+            </a:r>
+            <a:r>
+              <a:rPr lang="en-US" dirty="0">
+                <a:solidFill>
+                  <a:schemeClr val="accent6"/>
+                </a:solidFill>
+              </a:rPr>
+              <a:t>:</a:t>
             </a:r>
           </a:p>
           <a:p>
@@ -14289,8 +14224,8 @@
         </p:nvSpPr>
         <p:spPr>
           <a:xfrm>
-            <a:off x="2065020" y="4353025"/>
-            <a:ext cx="7239000" cy="830997"/>
+            <a:off x="1138588" y="4744052"/>
+            <a:ext cx="10291411" cy="1077218"/>
           </a:xfrm>
           <a:prstGeom prst="rect">
             <a:avLst/>
@@ -14311,34 +14246,14 @@
               </a:spcAft>
             </a:pPr>
             <a:r>
-              <a:rPr lang="en-US" sz="2400" dirty="0">
+              <a:rPr lang="en-US" sz="3200" b="1" dirty="0">
                 <a:solidFill>
                   <a:srgbClr val="00FF00"/>
                 </a:solidFill>
                 <a:latin typeface="Courier New" panose="02070309020205020404" pitchFamily="49" charset="0"/>
                 <a:ea typeface="MS Mincho" panose="02020609040205080304" pitchFamily="49" charset="-128"/>
               </a:rPr>
-              <a:t>with</a:t>
-            </a:r>
-            <a:r>
-              <a:rPr lang="en-US" sz="2400" dirty="0">
-                <a:solidFill>
-                  <a:srgbClr val="5B9BD5"/>
-                </a:solidFill>
-                <a:latin typeface="Courier New" panose="02070309020205020404" pitchFamily="49" charset="0"/>
-                <a:ea typeface="MS Mincho" panose="02020609040205080304" pitchFamily="49" charset="-128"/>
-              </a:rPr>
-              <a:t> open(filename, mode) </a:t>
-            </a:r>
-            <a:r>
-              <a:rPr lang="en-US" sz="2400" dirty="0">
-                <a:solidFill>
-                  <a:srgbClr val="00FF00"/>
-                </a:solidFill>
-                <a:latin typeface="Courier New" panose="02070309020205020404" pitchFamily="49" charset="0"/>
-                <a:ea typeface="MS Mincho" panose="02020609040205080304" pitchFamily="49" charset="-128"/>
-              </a:rPr>
-              <a:t>as variable:</a:t>
+              <a:t>with open(filename, mode) as variable:</a:t>
             </a:r>
           </a:p>
           <a:p>
@@ -14351,9 +14266,9 @@
               </a:spcAft>
             </a:pPr>
             <a:r>
-              <a:rPr lang="en-US" sz="2400" dirty="0">
-                <a:solidFill>
-                  <a:srgbClr val="5B9BD5"/>
+              <a:rPr lang="en-US" sz="3200" b="1" dirty="0">
+                <a:solidFill>
+                  <a:srgbClr val="00FF00"/>
                 </a:solidFill>
                 <a:latin typeface="Courier New" panose="02070309020205020404" pitchFamily="49" charset="0"/>
                 <a:ea typeface="MS Mincho" panose="02020609040205080304" pitchFamily="49" charset="-128"/>
